--- a/docs/08-答辩/开题答辩.pptx
+++ b/docs/08-答辩/开题答辩.pptx
@@ -517,8 +517,8 @@
           <a:p>
             <a:r>
               <a:rPr lang="en-US" dirty="0"/>
-              <a:t>【第 1 页 · 封面　约 25 秒】
-各位老师好，我是＿＿＿＿，我的毕业设计题目是《基于 Spring Boot 的智能组卷与试卷分析系统设计与实现》，指导教师是＿＿＿＿老师。下面由我向各位老师汇报本课题的开题情况。</a:t>
+              <a:t>【第 1 页 · 封面　约 15 秒】
+各位老师好，我是＿＿＿＿，毕业设计题目是《基于 Spring Boot 的智能组卷与试卷分析系统设计与实现》，指导教师是＿＿＿＿老师。下面汇报我的开题情况。</a:t>
             </a:r>
             <a:endParaRPr lang="en-US" dirty="0"/>
           </a:p>
@@ -606,8 +606,8 @@
           <a:p>
             <a:r>
               <a:rPr lang="en-US" dirty="0"/>
-              <a:t>【第 10 页 · 系统总体设计　约 50 秒】
-系统采用前后端分离的 B/S 架构，自上而下分为四层：前端层基于 Vue 3，配合 Element Plus、Pinia 和 ECharts；接口层是 RESTful 风格的接口，用 JSON 传输、JWT 鉴权；业务层由 Controller 和 Service 组成，智能组卷引擎和试卷分析引擎作为核心组件集成在业务层；数据层用 MyBatis-Plus 访问 MySQL，并用 Redis 做缓存。各层职责清晰、低耦合。</a:t>
+              <a:t>【第 10 页 · 系统总体设计　约 32 秒】
+系统采用前后端分离架构，分四层：前端层用 Vue 3，配合 Element Plus、Pinia、ECharts；接口层是 RESTful 接口，用 JSON 传输、JWT 鉴权；业务层由 Controller 和 Service 组成，集成智能组卷引擎和试卷分析引擎；数据层用 MyBatis-Plus 访问 MySQL，Redis 做缓存。</a:t>
             </a:r>
             <a:endParaRPr lang="en-US" dirty="0"/>
           </a:p>
@@ -695,8 +695,8 @@
           <a:p>
             <a:r>
               <a:rPr lang="en-US" dirty="0"/>
-              <a:t>【第 11 页 · 功能模块划分　约 35 秒】
-系统功能划分为七个模块：系统管理、题库管理、知识点管理、智能组卷、考试管理、试卷分析和个人中心。其中智能组卷和试卷分析是核心，其余是支撑。</a:t>
+              <a:t>【第 11 页 · 功能模块划分　约 22 秒】
+系统划分为六个模块：系统管理、题库管理、知识点管理、智能组卷、考试管理、试卷分析。其中智能组卷和试卷分析是核心，其余是支撑。</a:t>
             </a:r>
             <a:endParaRPr lang="en-US" dirty="0"/>
           </a:p>
@@ -784,8 +784,8 @@
           <a:p>
             <a:r>
               <a:rPr lang="en-US" dirty="0"/>
-              <a:t>【第 12 页 · 关键技术难点　约 50 秒】
-本课题的关键技术和难点有四个：一是组卷的多约束多目标建模与适应度函数设计，难点在于如何把各个约束统一到适应度函数并合理设定权重；二是遗传算法的编码方式与算子改进，要在收敛速度和种群多样性之间取得平衡，缓解早熟；三是题目难度和知识点的标注与标定，保证基础数据准确；四是试卷分析模型的建立与可视化。</a:t>
+              <a:t>【第 12 页 · 关键技术难点　约 28 秒】
+关键技术难点有四个：一是组卷的多约束多目标建模与适应度函数设计；二是遗传算法的编码与算子改进，要平衡收敛速度与种群多样性；三是题目难度和知识点的标注与标定；四是分析模型的建立与可视化。</a:t>
             </a:r>
             <a:endParaRPr lang="en-US" dirty="0"/>
           </a:p>
@@ -873,8 +873,8 @@
           <a:p>
             <a:r>
               <a:rPr lang="en-US" dirty="0"/>
-              <a:t>【第 13 页 · 核心亮点：智能组卷算法　约 70 秒】
-这里重点说一下核心亮点——智能组卷算法。我把一份试卷的优劣用一个适应度函数来度量，它是难度贴近度、知识点覆盖、题型结构、答题时间四项的加权和，再减去一个对违反硬约束的惩罚项。在算法上做了四点改进：按题型分段编码，使题量和分值约束天然得到满足；采用自适应的交叉和变异概率，让算法在收敛速度和种群多样性之间自动平衡；加入精英保留，防止最优解退化；用锦标赛选择提高选择压力。最后我会在相同题库和约束下，把改进算法与随机组卷、标准遗传算法各重复运行多次，用组卷成功率和收敛曲线等数据来验证改进效果。</a:t>
+              <a:t>【第 13 页 · 核心亮点：智能组卷算法　约 42 秒】
+重点说核心亮点。我用一个适应度函数衡量试卷优劣，它是难度贴近度、知识点覆盖、题型结构、答题时间四项的加权和，再减去违反硬约束的惩罚项。算法上做了四点改进：按题型分段编码，使题量与分值约束天然满足；自适应交叉与变异概率；精英保留防止最优解退化；锦标赛选择提高选择压力。最后在相同题库与约束下，与随机组卷、标准遗传算法对比验证效果。</a:t>
             </a:r>
             <a:endParaRPr lang="en-US" dirty="0"/>
           </a:p>
@@ -962,8 +962,8 @@
           <a:p>
             <a:r>
               <a:rPr lang="en-US" dirty="0"/>
-              <a:t>【第 14 页 · 进度安排　约 40 秒】
-进度上分四个阶段：十月到十一月完成开题、需求分析和系统与数据库设计；十二月到明年一月完成改进遗传算法和后端核心功能；二月到三月做前端开发、前后端联调、试卷分析模块和系统测试；四月到五月完成系统部署、论文撰写和答辩。</a:t>
+              <a:t>【第 14 页 · 进度安排　约 22 秒】
+进度分四个阶段：十月到十一月完成开题与设计；十二月到一月完成算法与后端；二月到三月做前端、分析模块与测试；四月到五月完成部署、论文与答辩。</a:t>
             </a:r>
             <a:endParaRPr lang="en-US" dirty="0"/>
           </a:p>
@@ -1051,8 +1051,8 @@
           <a:p>
             <a:r>
               <a:rPr lang="en-US" dirty="0"/>
-              <a:t>【第 15 页 · 预期成果与特色　约 35 秒】
-预期成果包括：一套可运行的系统、算法对比实验数据、需求与设计等文档、一篇毕业论文和答辩演示文稿。本课题的特色在于用改进遗传算法实现了多约束多目标的智能组卷，并把组卷与分析打通成闭环，还能做面向知识点的掌握诊断。</a:t>
+              <a:t>【第 15 页 · 预期成果与特色　约 18 秒】
+预期成果包括可运行的系统、算法对比实验数据、需求与设计文档、毕业论文和答辩演示文稿。特色是用改进遗传算法实现多约束多目标的智能组卷，并把组卷与分析打通成闭环。</a:t>
             </a:r>
             <a:endParaRPr lang="en-US" dirty="0"/>
           </a:p>
@@ -1140,7 +1140,7 @@
           <a:p>
             <a:r>
               <a:rPr lang="en-US" dirty="0"/>
-              <a:t>【第 16 页 · 结束　约 15 秒】
+              <a:t>【第 16 页 · 结束　约 10 秒】
 以上就是我的开题汇报，恳请各位老师批评指正，谢谢！</a:t>
             </a:r>
             <a:endParaRPr lang="en-US" dirty="0"/>
@@ -1229,8 +1229,8 @@
           <a:p>
             <a:r>
               <a:rPr lang="en-US" dirty="0"/>
-              <a:t>【第 2 页 · 汇报提纲　约 20 秒】
-我的汇报分为六个部分：选题背景与意义、国内外研究现状、研究内容与目标、技术路线与系统设计、关键技术难点与创新点，最后是进度安排与预期成果。</a:t>
+              <a:t>【第 2 页 · 汇报提纲　约 12 秒】
+我的汇报分六个部分：选题背景与意义、研究现状、研究内容与目标、技术路线与系统设计、关键技术与创新点、进度与预期成果。</a:t>
             </a:r>
             <a:endParaRPr lang="en-US" dirty="0"/>
           </a:p>
@@ -1318,8 +1318,8 @@
           <a:p>
             <a:r>
               <a:rPr lang="en-US" dirty="0"/>
-              <a:t>【第 3 页 · 选题背景　约 50 秒】
-首先是选题背景。随着教育信息化的推进，在线考试和机考越来越普及，考试是教学评价的核心环节，而组卷是组织考试的第一步。但目前多数学校的组卷仍依赖教师手工完成，存在四个突出问题：一是效率低，一份结构合理的试卷往往要花几个小时；二是主观性强，难度分布和知识点覆盖难以精确控制；三是题库资源闲置，优质试题没有通过科学组合发挥价值；四是试卷分析浅，考完只看到总分，看不到学生在知识点层面的掌握情况。</a:t>
+              <a:t>【第 3 页 · 选题背景　约 32 秒】
+教育信息化推动在线考试普及，组卷是组织考试的第一步。但目前组卷仍多依赖教师手工完成，存在四个问题：效率低、主观性强、题库资源闲置，以及试卷分析浅——只看到总分，看不到学生在知识点上的掌握情况。</a:t>
             </a:r>
             <a:endParaRPr lang="en-US" dirty="0"/>
           </a:p>
@@ -1407,8 +1407,8 @@
           <a:p>
             <a:r>
               <a:rPr lang="en-US" dirty="0"/>
-              <a:t>【第 4 页 · 选题意义　约 40 秒】
-因此，本课题的意义体现在两方面。理论上，我把组卷抽象为一个带约束的多目标组合优化问题，研究遗传算法在该问题上的建模与改进，并引入经典测量理论对试卷质量做量化评估，是算法与教育测量相结合的一次实践。实践上，系统能降低教师组卷的工作量、提升试卷的科学性，并把考试反馈从分数推进到知识点诊断，具有实际应用价值；同时它覆盖了需求、设计、算法、前后端开发到测试部署的完整工程流程。</a:t>
+              <a:t>【第 4 页 · 选题意义　约 22 秒】
+本课题有理论和实践两方面意义。理论上，把组卷抽象为带约束的多目标优化问题，用遗传算法建模求解，并引入经典测量理论评估试卷质量。实践上，能减轻教师组卷负担、提升试卷科学性，把考试反馈推进到知识点诊断，同时覆盖完整的软件工程流程。</a:t>
             </a:r>
             <a:endParaRPr lang="en-US" dirty="0"/>
           </a:p>
@@ -1496,8 +1496,8 @@
           <a:p>
             <a:r>
               <a:rPr lang="en-US" dirty="0"/>
-              <a:t>【第 5 页 · 研究现状：智能组卷算法　约 60 秒】
-第二部分是国内外研究现状，先看智能组卷算法。组卷的本质是在满足总分、题型、知识点、难度、时间等一系列约束的前提下，从题库中选出一组题目，属于典型的 NP 难问题。现有方法大致分三类：第一类是早期的随机抽取加约束过滤以及回溯算法，实现简单，但多约束下成功率低、效率差；第二类是遗传算法，它全局搜索能力强，是目前应用最广的方法，研究者主要在编码方式、适应度函数和算子改进上做工作，但普遍存在收敛慢、容易早熟、参数依赖经验的问题；第三类是模拟退火、禁忌搜索、蚁群、粒子群等其他智能算法，以及把多种算法结合的混合算法，用来弥补单一算法的不足。</a:t>
+              <a:t>【第 5 页 · 研究现状：智能组卷算法　约 32 秒】
+组卷是在总分、题型、知识点、难度、时间等约束下选题，属于 NP 难问题。现有方法有三类：一是随机抽取与回溯，实现简单但多约束下成功率低；二是遗传算法，全局搜索能力强、应用最广，但存在收敛慢、易早熟、参数依赖经验的问题；三是模拟退火、蚁群等其他智能算法与混合算法。</a:t>
             </a:r>
             <a:endParaRPr lang="en-US" dirty="0"/>
           </a:p>
@@ -1585,8 +1585,8 @@
           <a:p>
             <a:r>
               <a:rPr lang="en-US" dirty="0"/>
-              <a:t>【第 6 页 · 研究现状：试卷分析与现有系统不足　约 50 秒】
-再看试卷分析方向。经典测量理论通过难度、区分度、信度、效度来评价试卷质量，计算简单、含义直观，应用最广；项目反应理论模型更精细，但对样本要求较高；近年来基于作答数据的认知诊断，把分析从分数统计推进到知识诊断。综合来看，现有系统存在三点不足：组卷算法智能化不足、组卷与分析相互割裂不成闭环、分析停留在统计层面缺少知识点诊断。这正是本课题的切入点。</a:t>
+              <a:t>【第 6 页 · 研究现状：试卷分析与现有系统不足　约 28 秒】
+试卷分析方面，经典测量理论用难度、区分度、信度评价试卷，应用最广；项目反应理论更精细但对样本要求高；认知诊断则从分数统计走向知识诊断。综合来看，现有系统有三点不足：组卷智能化不足、组卷与分析相互割裂、分析缺少知识点诊断。这正是本课题的切入点。</a:t>
             </a:r>
             <a:endParaRPr lang="en-US" dirty="0"/>
           </a:p>
@@ -1674,8 +1674,8 @@
           <a:p>
             <a:r>
               <a:rPr lang="en-US" dirty="0"/>
-              <a:t>【第 7 页 · 研究内容　约 60 秒】
-基于上面的分析，本课题的研究内容有五个方面：第一，题库与知识体系建模，支持多题型，并为题目设置难度、知识点、分值等属性，构建知识点层级；第二，智能组卷算法的研究与实现，把组卷建模为多约束多目标优化问题，用改进遗传算法求解，并与随机组卷和标准遗传算法做对比；第三，组卷约束与模板管理，支持教师自定义题型、分值、难度、知识点覆盖等约束；第四，试卷分析模块，计算难度、区分度、信度等指标并做知识点诊断；第五，系统的设计与实现，基于 Spring Boot 加 Vue 前后端分离完成开发与部署。</a:t>
+              <a:t>【第 7 页 · 研究内容　约 38 秒】
+本课题有五项研究内容：一是题库与知识体系建模；二是智能组卷算法，用改进遗传算法求解，并与随机组卷、标准遗传算法对比；三是组卷约束与模板管理；四是试卷分析模块；五是系统的设计与实现。</a:t>
             </a:r>
             <a:endParaRPr lang="en-US" dirty="0"/>
           </a:p>
@@ -1763,8 +1763,8 @@
           <a:p>
             <a:r>
               <a:rPr lang="en-US" dirty="0"/>
-              <a:t>【第 8 页 · 研究目标　约 35 秒】
-目标是建成一个可稳定运行的系统。具体来说有三点：一是所实现的改进遗传算法在满足全部组卷约束的前提下，组卷成功率和试卷质量指标优于随机组卷和标准遗传算法；二是试卷分析能够输出难度、区分度、信度等指标和知识点诊断结果；三是把组卷和分析连起来，形成从组卷到分析的完整闭环。</a:t>
+              <a:t>【第 8 页 · 研究目标　约 22 秒】
+目标是建成一个可稳定运行的系统：改进算法的组卷成功率和试卷质量指标优于基线，试卷分析能输出难度、区分度、信度等指标以及知识点诊断结果，最终形成从组卷到分析的闭环。</a:t>
             </a:r>
             <a:endParaRPr lang="en-US" dirty="0"/>
           </a:p>
@@ -1852,8 +1852,8 @@
           <a:p>
             <a:r>
               <a:rPr lang="en-US" dirty="0"/>
-              <a:t>【第 9 页 · 技术路线　约 40 秒】
-技术路线上，我按需求分析、系统设计、算法设计、编码实现、测试优化到论文撰写这样的顺序推进，整体思路是先建模、再算法、后工程、最后验证，保证理论设计和工程实现相互印证。</a:t>
+              <a:t>【第 9 页 · 技术路线　约 22 秒】
+技术路线上，按需求分析、系统设计、算法设计、编码实现、测试优化、论文撰写的顺序推进，整体思路是先建模、再算法、后工程、终验证。</a:t>
             </a:r>
             <a:endParaRPr lang="en-US" dirty="0"/>
           </a:p>
@@ -3451,12 +3451,12 @@
         </p:nvSpPr>
         <p:spPr>
           <a:xfrm>
-            <a:off x="640080" y="1600200"/>
-            <a:ext cx="2521458" cy="1874520"/>
+            <a:off x="640080" y="1691640"/>
+            <a:ext cx="3422904" cy="1920240"/>
           </a:xfrm>
           <a:prstGeom prst="roundRect">
             <a:avLst>
-              <a:gd name="adj" fmla="val 3902"/>
+              <a:gd name="adj" fmla="val 3810"/>
             </a:avLst>
           </a:prstGeom>
           <a:solidFill>
@@ -3478,8 +3478,8 @@
         </p:nvSpPr>
         <p:spPr>
           <a:xfrm>
-            <a:off x="896112" y="1920240"/>
-            <a:ext cx="2009394" cy="457200"/>
+            <a:off x="896112" y="2011680"/>
+            <a:ext cx="2910840" cy="457200"/>
           </a:xfrm>
           <a:prstGeom prst="rect">
             <a:avLst/>
@@ -3517,8 +3517,8 @@
         </p:nvSpPr>
         <p:spPr>
           <a:xfrm>
-            <a:off x="896112" y="2468880"/>
-            <a:ext cx="2009394" cy="822960"/>
+            <a:off x="896112" y="2560320"/>
+            <a:ext cx="2910840" cy="822960"/>
           </a:xfrm>
           <a:prstGeom prst="rect">
             <a:avLst/>
@@ -3559,12 +3559,12 @@
         </p:nvSpPr>
         <p:spPr>
           <a:xfrm>
-            <a:off x="3435858" y="1600200"/>
-            <a:ext cx="2521458" cy="1874520"/>
+            <a:off x="4383024" y="1691640"/>
+            <a:ext cx="3422904" cy="1920240"/>
           </a:xfrm>
           <a:prstGeom prst="roundRect">
             <a:avLst>
-              <a:gd name="adj" fmla="val 3902"/>
+              <a:gd name="adj" fmla="val 3810"/>
             </a:avLst>
           </a:prstGeom>
           <a:solidFill>
@@ -3586,8 +3586,8 @@
         </p:nvSpPr>
         <p:spPr>
           <a:xfrm>
-            <a:off x="3691890" y="1920240"/>
-            <a:ext cx="2009394" cy="457200"/>
+            <a:off x="4639056" y="2011680"/>
+            <a:ext cx="2910840" cy="457200"/>
           </a:xfrm>
           <a:prstGeom prst="rect">
             <a:avLst/>
@@ -3625,8 +3625,8 @@
         </p:nvSpPr>
         <p:spPr>
           <a:xfrm>
-            <a:off x="3691890" y="2468880"/>
-            <a:ext cx="2009394" cy="822960"/>
+            <a:off x="4639056" y="2560320"/>
+            <a:ext cx="2910840" cy="822960"/>
           </a:xfrm>
           <a:prstGeom prst="rect">
             <a:avLst/>
@@ -3667,12 +3667,12 @@
         </p:nvSpPr>
         <p:spPr>
           <a:xfrm>
-            <a:off x="6231636" y="1600200"/>
-            <a:ext cx="2521458" cy="1874520"/>
+            <a:off x="8125968" y="1691640"/>
+            <a:ext cx="3422904" cy="1920240"/>
           </a:xfrm>
           <a:prstGeom prst="roundRect">
             <a:avLst>
-              <a:gd name="adj" fmla="val 3902"/>
+              <a:gd name="adj" fmla="val 3810"/>
             </a:avLst>
           </a:prstGeom>
           <a:solidFill>
@@ -3694,8 +3694,8 @@
         </p:nvSpPr>
         <p:spPr>
           <a:xfrm>
-            <a:off x="6487668" y="1920240"/>
-            <a:ext cx="2009394" cy="457200"/>
+            <a:off x="8382000" y="2011680"/>
+            <a:ext cx="2910840" cy="457200"/>
           </a:xfrm>
           <a:prstGeom prst="rect">
             <a:avLst/>
@@ -3733,8 +3733,8 @@
         </p:nvSpPr>
         <p:spPr>
           <a:xfrm>
-            <a:off x="6487668" y="2468880"/>
-            <a:ext cx="2009394" cy="822960"/>
+            <a:off x="8382000" y="2560320"/>
+            <a:ext cx="2910840" cy="822960"/>
           </a:xfrm>
           <a:prstGeom prst="rect">
             <a:avLst/>
@@ -3775,12 +3775,12 @@
         </p:nvSpPr>
         <p:spPr>
           <a:xfrm>
-            <a:off x="9027414" y="1600200"/>
-            <a:ext cx="2521458" cy="1874520"/>
+            <a:off x="640080" y="3886200"/>
+            <a:ext cx="3422904" cy="1920240"/>
           </a:xfrm>
           <a:prstGeom prst="roundRect">
             <a:avLst>
-              <a:gd name="adj" fmla="val 3902"/>
+              <a:gd name="adj" fmla="val 3810"/>
             </a:avLst>
           </a:prstGeom>
           <a:solidFill>
@@ -3802,8 +3802,8 @@
         </p:nvSpPr>
         <p:spPr>
           <a:xfrm>
-            <a:off x="9283446" y="1920240"/>
-            <a:ext cx="2009394" cy="457200"/>
+            <a:off x="896112" y="4206240"/>
+            <a:ext cx="2910840" cy="457200"/>
           </a:xfrm>
           <a:prstGeom prst="rect">
             <a:avLst/>
@@ -3841,8 +3841,8 @@
         </p:nvSpPr>
         <p:spPr>
           <a:xfrm>
-            <a:off x="9283446" y="2468880"/>
-            <a:ext cx="2009394" cy="822960"/>
+            <a:off x="896112" y="4754880"/>
+            <a:ext cx="2910840" cy="822960"/>
           </a:xfrm>
           <a:prstGeom prst="rect">
             <a:avLst/>
@@ -3883,7 +3883,7 @@
         </p:nvSpPr>
         <p:spPr>
           <a:xfrm>
-            <a:off x="10680192" y="1892808"/>
+            <a:off x="3194304" y="4178808"/>
             <a:ext cx="594360" cy="320040"/>
           </a:xfrm>
           <a:prstGeom prst="rect">
@@ -3922,12 +3922,12 @@
         </p:nvSpPr>
         <p:spPr>
           <a:xfrm>
-            <a:off x="2039341" y="3794760"/>
-            <a:ext cx="2521458" cy="1874520"/>
+            <a:off x="4383024" y="3886200"/>
+            <a:ext cx="3422904" cy="1920240"/>
           </a:xfrm>
           <a:prstGeom prst="roundRect">
             <a:avLst>
-              <a:gd name="adj" fmla="val 3902"/>
+              <a:gd name="adj" fmla="val 3810"/>
             </a:avLst>
           </a:prstGeom>
           <a:solidFill>
@@ -3949,8 +3949,8 @@
         </p:nvSpPr>
         <p:spPr>
           <a:xfrm>
-            <a:off x="2295373" y="4114800"/>
-            <a:ext cx="2009394" cy="457200"/>
+            <a:off x="4639056" y="4206240"/>
+            <a:ext cx="2910840" cy="457200"/>
           </a:xfrm>
           <a:prstGeom prst="rect">
             <a:avLst/>
@@ -3988,8 +3988,8 @@
         </p:nvSpPr>
         <p:spPr>
           <a:xfrm>
-            <a:off x="2295373" y="4663440"/>
-            <a:ext cx="2009394" cy="822960"/>
+            <a:off x="4639056" y="4754880"/>
+            <a:ext cx="2910840" cy="822960"/>
           </a:xfrm>
           <a:prstGeom prst="rect">
             <a:avLst/>
@@ -4030,12 +4030,12 @@
         </p:nvSpPr>
         <p:spPr>
           <a:xfrm>
-            <a:off x="4835119" y="3794760"/>
-            <a:ext cx="2521458" cy="1874520"/>
+            <a:off x="8125968" y="3886200"/>
+            <a:ext cx="3422904" cy="1920240"/>
           </a:xfrm>
           <a:prstGeom prst="roundRect">
             <a:avLst>
-              <a:gd name="adj" fmla="val 3902"/>
+              <a:gd name="adj" fmla="val 3810"/>
             </a:avLst>
           </a:prstGeom>
           <a:solidFill>
@@ -4057,8 +4057,8 @@
         </p:nvSpPr>
         <p:spPr>
           <a:xfrm>
-            <a:off x="5091151" y="4114800"/>
-            <a:ext cx="2009394" cy="457200"/>
+            <a:off x="8382000" y="4206240"/>
+            <a:ext cx="2910840" cy="457200"/>
           </a:xfrm>
           <a:prstGeom prst="rect">
             <a:avLst/>
@@ -4096,8 +4096,8 @@
         </p:nvSpPr>
         <p:spPr>
           <a:xfrm>
-            <a:off x="5091151" y="4663440"/>
-            <a:ext cx="2009394" cy="822960"/>
+            <a:off x="8382000" y="4754880"/>
+            <a:ext cx="2910840" cy="822960"/>
           </a:xfrm>
           <a:prstGeom prst="rect">
             <a:avLst/>
@@ -4138,7 +4138,7 @@
         </p:nvSpPr>
         <p:spPr>
           <a:xfrm>
-            <a:off x="6487897" y="4087368"/>
+            <a:off x="10680192" y="4178808"/>
             <a:ext cx="594360" cy="320040"/>
           </a:xfrm>
           <a:prstGeom prst="rect">
@@ -4171,115 +4171,7 @@
       </p:sp>
       <p:sp>
         <p:nvSpPr>
-          <p:cNvPr id="23" name="Shape 21"/>
-          <p:cNvSpPr/>
-          <p:nvPr/>
-        </p:nvSpPr>
-        <p:spPr>
-          <a:xfrm>
-            <a:off x="7630897" y="3794760"/>
-            <a:ext cx="2521458" cy="1874520"/>
-          </a:xfrm>
-          <a:prstGeom prst="roundRect">
-            <a:avLst>
-              <a:gd name="adj" fmla="val 3902"/>
-            </a:avLst>
-          </a:prstGeom>
-          <a:solidFill>
-            <a:srgbClr val="FFFFFF"/>
-          </a:solidFill>
-          <a:ln w="12700">
-            <a:solidFill>
-              <a:srgbClr val="D6DEE6"/>
-            </a:solidFill>
-            <a:prstDash val="solid"/>
-          </a:ln>
-        </p:spPr>
-      </p:sp>
-      <p:sp>
-        <p:nvSpPr>
-          <p:cNvPr id="24" name="Text 22"/>
-          <p:cNvSpPr txBox="1"/>
-          <p:nvPr/>
-        </p:nvSpPr>
-        <p:spPr>
-          <a:xfrm>
-            <a:off x="7886929" y="4114800"/>
-            <a:ext cx="2009394" cy="457200"/>
-          </a:xfrm>
-          <a:prstGeom prst="rect">
-            <a:avLst/>
-          </a:prstGeom>
-          <a:noFill/>
-          <a:ln/>
-        </p:spPr>
-        <p:txBody>
-          <a:bodyPr wrap="square" lIns="0" tIns="0" rIns="0" bIns="0" rtlCol="0" anchor="ctr"/>
-          <a:lstStyle/>
-          <a:p>
-            <a:pPr indent="0" marL="0">
-              <a:buNone/>
-            </a:pPr>
-            <a:r>
-              <a:rPr lang="en-US" sz="1550" b="1" dirty="0">
-                <a:solidFill>
-                  <a:srgbClr val="16324F"/>
-                </a:solidFill>
-                <a:latin typeface="微软雅黑" pitchFamily="34" charset="0"/>
-                <a:ea typeface="微软雅黑" pitchFamily="34" charset="-122"/>
-                <a:cs typeface="微软雅黑" pitchFamily="34" charset="-120"/>
-              </a:rPr>
-              <a:t>个人中心</a:t>
-            </a:r>
-            <a:endParaRPr lang="en-US" sz="1550" dirty="0"/>
-          </a:p>
-        </p:txBody>
-      </p:sp>
-      <p:sp>
-        <p:nvSpPr>
-          <p:cNvPr id="25" name="Text 23"/>
-          <p:cNvSpPr txBox="1"/>
-          <p:nvPr/>
-        </p:nvSpPr>
-        <p:spPr>
-          <a:xfrm>
-            <a:off x="7886929" y="4663440"/>
-            <a:ext cx="2009394" cy="822960"/>
-          </a:xfrm>
-          <a:prstGeom prst="rect">
-            <a:avLst/>
-          </a:prstGeom>
-          <a:noFill/>
-          <a:ln/>
-        </p:spPr>
-        <p:txBody>
-          <a:bodyPr wrap="square" lIns="0" tIns="0" rIns="0" bIns="0" rtlCol="0" anchor="ctr"/>
-          <a:lstStyle/>
-          <a:p>
-            <a:pPr indent="0" marL="0">
-              <a:lnSpc>
-                <a:spcPct val="115000"/>
-              </a:lnSpc>
-              <a:buNone/>
-            </a:pPr>
-            <a:r>
-              <a:rPr lang="en-US" sz="1150" dirty="0">
-                <a:solidFill>
-                  <a:srgbClr val="5B6B7B"/>
-                </a:solidFill>
-                <a:latin typeface="微软雅黑" pitchFamily="34" charset="0"/>
-                <a:ea typeface="微软雅黑" pitchFamily="34" charset="-122"/>
-                <a:cs typeface="微软雅黑" pitchFamily="34" charset="-120"/>
-              </a:rPr>
-              <a:t>信息 / 我的考试与成绩</a:t>
-            </a:r>
-            <a:endParaRPr lang="en-US" sz="1150" dirty="0"/>
-          </a:p>
-        </p:txBody>
-      </p:sp>
-      <p:sp>
-        <p:nvSpPr>
-          <p:cNvPr id="26" name="Text 24"/>
+          <p:cNvPr id="23" name="Text 21"/>
           <p:cNvSpPr txBox="1"/>
           <p:nvPr/>
         </p:nvSpPr>
